--- a/Supply_Chain_Risk_Intelligence_Presentation.pptx
+++ b/Supply_Chain_Risk_Intelligence_Presentation.pptx
@@ -2204,13 +2204,6 @@
 <file path=ppt/slides/slide1.xml><?xml version="1.0" encoding="utf-8"?>
 <p:sld xmlns:a="http://schemas.openxmlformats.org/drawingml/2006/main" xmlns:r="http://schemas.openxmlformats.org/officeDocument/2006/relationships" xmlns:p="http://schemas.openxmlformats.org/presentationml/2006/main">
   <p:cSld name="Slide 1">
-    <p:bg>
-      <p:bgPr>
-        <a:solidFill>
-          <a:srgbClr val="FFFFFF"/>
-        </a:solidFill>
-      </p:bgPr>
-    </p:bg>
     <p:spTree>
       <p:nvGrpSpPr>
         <p:cNvPr id="1" name=""/>
@@ -2225,26 +2218,49 @@
           <a:chExt cx="0" cy="0"/>
         </a:xfrm>
       </p:grpSpPr>
-      <p:sp>
-        <p:nvSpPr>
-          <p:cNvPr id="2" name="Shape 0"/>
-          <p:cNvSpPr/>
-          <p:nvPr/>
-        </p:nvSpPr>
+      <p:pic>
+        <p:nvPicPr>
+          <p:cNvPr id="2" name="Image 0" descr="/sessions/fervent-serene-cray/mnt/outputs/kranti_slide-01.jpg">    </p:cNvPr>
+          <p:cNvPicPr>
+            <a:picLocks noChangeAspect="1"/>
+          </p:cNvPicPr>
+          <p:nvPr/>
+        </p:nvPicPr>
+        <p:blipFill>
+          <a:blip r:embed="rId1"/>
+          <a:srcRect l="0" r="0" t="0" b="0"/>
+          <a:stretch/>
+        </p:blipFill>
         <p:spPr>
           <a:xfrm>
             <a:off x="0" y="0"/>
-            <a:ext cx="457200" cy="5143500"/>
-          </a:xfrm>
-          <a:prstGeom prst="rect">
-            <a:avLst/>
-          </a:prstGeom>
-          <a:solidFill>
-            <a:srgbClr val="C8102E"/>
+            <a:ext cx="9144000" cy="5143500"/>
+          </a:xfrm>
+          <a:prstGeom prst="rect">
+            <a:avLst/>
+          </a:prstGeom>
+        </p:spPr>
+      </p:pic>
+      <p:sp>
+        <p:nvSpPr>
+          <p:cNvPr id="3" name="Shape 0"/>
+          <p:cNvSpPr/>
+          <p:nvPr/>
+        </p:nvSpPr>
+        <p:spPr>
+          <a:xfrm>
+            <a:off x="4023360" y="1737360"/>
+            <a:ext cx="5074920" cy="1737360"/>
+          </a:xfrm>
+          <a:prstGeom prst="rect">
+            <a:avLst/>
+          </a:prstGeom>
+          <a:solidFill>
+            <a:srgbClr val="FFFFFF"/>
           </a:solidFill>
           <a:ln w="12700">
             <a:solidFill>
-              <a:srgbClr val="C8102E"/>
+              <a:srgbClr val="FFFFFF"/>
             </a:solidFill>
             <a:prstDash val="solid"/>
           </a:ln>
@@ -2252,114 +2268,14 @@
       </p:sp>
       <p:sp>
         <p:nvSpPr>
-          <p:cNvPr id="3" name="Shape 1"/>
-          <p:cNvSpPr/>
-          <p:nvPr/>
-        </p:nvSpPr>
-        <p:spPr>
-          <a:xfrm>
-            <a:off x="0" y="0"/>
-            <a:ext cx="9144000" cy="73152"/>
-          </a:xfrm>
-          <a:prstGeom prst="rect">
-            <a:avLst/>
-          </a:prstGeom>
-          <a:solidFill>
-            <a:srgbClr val="C8102E"/>
-          </a:solidFill>
-          <a:ln w="12700">
-            <a:solidFill>
-              <a:srgbClr val="C8102E"/>
-            </a:solidFill>
-            <a:prstDash val="solid"/>
-          </a:ln>
-        </p:spPr>
-      </p:sp>
-      <p:sp>
-        <p:nvSpPr>
-          <p:cNvPr id="4" name="Shape 2"/>
-          <p:cNvSpPr/>
-          <p:nvPr/>
-        </p:nvSpPr>
-        <p:spPr>
-          <a:xfrm>
-            <a:off x="6400800" y="3474720"/>
-            <a:ext cx="2743200" cy="1668780"/>
-          </a:xfrm>
-          <a:prstGeom prst="rect">
-            <a:avLst/>
-          </a:prstGeom>
-          <a:solidFill>
-            <a:srgbClr val="C8102E"/>
-          </a:solidFill>
-          <a:ln w="12700">
-            <a:solidFill>
-              <a:srgbClr val="C8102E"/>
-            </a:solidFill>
-            <a:prstDash val="solid"/>
-          </a:ln>
-        </p:spPr>
-      </p:sp>
-      <p:sp>
-        <p:nvSpPr>
-          <p:cNvPr id="5" name="Shape 3"/>
-          <p:cNvSpPr/>
-          <p:nvPr/>
-        </p:nvSpPr>
-        <p:spPr>
-          <a:xfrm>
-            <a:off x="6766560" y="3108960"/>
-            <a:ext cx="2377440" cy="2034540"/>
-          </a:xfrm>
-          <a:prstGeom prst="rect">
-            <a:avLst/>
-          </a:prstGeom>
-          <a:solidFill>
-            <a:srgbClr val="E5E7EB"/>
-          </a:solidFill>
-          <a:ln w="12700">
-            <a:solidFill>
-              <a:srgbClr val="E5E7EB"/>
-            </a:solidFill>
-            <a:prstDash val="solid"/>
-          </a:ln>
-        </p:spPr>
-      </p:sp>
-      <p:sp>
-        <p:nvSpPr>
-          <p:cNvPr id="6" name="Shape 4"/>
-          <p:cNvSpPr/>
-          <p:nvPr/>
-        </p:nvSpPr>
-        <p:spPr>
-          <a:xfrm>
-            <a:off x="6766560" y="3108960"/>
-            <a:ext cx="2377440" cy="2034540"/>
-          </a:xfrm>
-          <a:prstGeom prst="rect">
-            <a:avLst/>
-          </a:prstGeom>
-          <a:solidFill>
-            <a:srgbClr val="C8102E"/>
-          </a:solidFill>
-          <a:ln w="12700">
-            <a:solidFill>
-              <a:srgbClr val="C8102E"/>
-            </a:solidFill>
-            <a:prstDash val="solid"/>
-          </a:ln>
-        </p:spPr>
-      </p:sp>
-      <p:sp>
-        <p:nvSpPr>
-          <p:cNvPr id="7" name="Text 5"/>
-          <p:cNvSpPr/>
-          <p:nvPr/>
-        </p:nvSpPr>
-        <p:spPr>
-          <a:xfrm>
-            <a:off x="731520" y="457200"/>
-            <a:ext cx="2743200" cy="457200"/>
+          <p:cNvPr id="4" name="Text 1"/>
+          <p:cNvSpPr/>
+          <p:nvPr/>
+        </p:nvSpPr>
+        <p:spPr>
+          <a:xfrm>
+            <a:off x="4114800" y="1920240"/>
+            <a:ext cx="4846320" cy="1280160"/>
           </a:xfrm>
           <a:prstGeom prst="rect">
             <a:avLst/>
@@ -2372,49 +2288,33 @@
           <a:lstStyle/>
           <a:p>
             <a:pPr indent="0" marL="0">
-              <a:buNone/>
-            </a:pPr>
-            <a:r>
-              <a:rPr lang="en-US" sz="2200" b="1" dirty="0">
-                <a:solidFill>
-                  <a:srgbClr val="C8102E"/>
+              <a:lnSpc>
+                <a:spcPct val="120000"/>
+              </a:lnSpc>
+              <a:buNone/>
+            </a:pPr>
+            <a:r>
+              <a:rPr lang="en-US" sz="2400" b="1" dirty="0">
+                <a:solidFill>
+                  <a:srgbClr val="1F2937"/>
                 </a:solidFill>
                 <a:latin typeface="Montserrat" pitchFamily="34" charset="0"/>
                 <a:ea typeface="Montserrat" pitchFamily="34" charset="-122"/>
                 <a:cs typeface="Montserrat" pitchFamily="34" charset="-120"/>
               </a:rPr>
-              <a:t>Prodapt.</a:t>
-            </a:r>
-            <a:endParaRPr lang="en-US" sz="2200" dirty="0"/>
-          </a:p>
-        </p:txBody>
-      </p:sp>
-      <p:sp>
-        <p:nvSpPr>
-          <p:cNvPr id="8" name="Text 6"/>
-          <p:cNvSpPr/>
-          <p:nvPr/>
-        </p:nvSpPr>
-        <p:spPr>
-          <a:xfrm>
-            <a:off x="731520" y="1188720"/>
-            <a:ext cx="7772400" cy="685800"/>
-          </a:xfrm>
-          <a:prstGeom prst="rect">
-            <a:avLst/>
-          </a:prstGeom>
-          <a:noFill/>
-          <a:ln/>
-        </p:spPr>
-        <p:txBody>
-          <a:bodyPr wrap="square" lIns="0" tIns="0" rIns="0" bIns="0" rtlCol="0" anchor="ctr"/>
-          <a:lstStyle/>
+              <a:t>AI-Powered Supply Chain</a:t>
+            </a:r>
+            <a:endParaRPr lang="en-US" sz="2400" dirty="0"/>
+          </a:p>
           <a:p>
             <a:pPr indent="0" marL="0">
-              <a:buNone/>
-            </a:pPr>
-            <a:r>
-              <a:rPr lang="en-US" sz="3400" b="1" dirty="0">
+              <a:lnSpc>
+                <a:spcPct val="120000"/>
+              </a:lnSpc>
+              <a:buNone/>
+            </a:pPr>
+            <a:r>
+              <a:rPr lang="en-US" sz="2400" b="1" dirty="0">
                 <a:solidFill>
                   <a:srgbClr val="1F2937"/>
                 </a:solidFill>
@@ -2422,446 +2322,9 @@
                 <a:ea typeface="Montserrat" pitchFamily="34" charset="-122"/>
                 <a:cs typeface="Montserrat" pitchFamily="34" charset="-120"/>
               </a:rPr>
-              <a:t>AI-Powered Supply Chain</a:t>
-            </a:r>
-            <a:endParaRPr lang="en-US" sz="3400" dirty="0"/>
-          </a:p>
-        </p:txBody>
-      </p:sp>
-      <p:sp>
-        <p:nvSpPr>
-          <p:cNvPr id="9" name="Text 7"/>
-          <p:cNvSpPr/>
-          <p:nvPr/>
-        </p:nvSpPr>
-        <p:spPr>
-          <a:xfrm>
-            <a:off x="731520" y="1828800"/>
-            <a:ext cx="7772400" cy="685800"/>
-          </a:xfrm>
-          <a:prstGeom prst="rect">
-            <a:avLst/>
-          </a:prstGeom>
-          <a:noFill/>
-          <a:ln/>
-        </p:spPr>
-        <p:txBody>
-          <a:bodyPr wrap="square" lIns="0" tIns="0" rIns="0" bIns="0" rtlCol="0" anchor="ctr"/>
-          <a:lstStyle/>
-          <a:p>
-            <a:pPr indent="0" marL="0">
-              <a:buNone/>
-            </a:pPr>
-            <a:r>
-              <a:rPr lang="en-US" sz="3400" b="1" dirty="0">
-                <a:solidFill>
-                  <a:srgbClr val="C8102E"/>
-                </a:solidFill>
-                <a:latin typeface="Montserrat" pitchFamily="34" charset="0"/>
-                <a:ea typeface="Montserrat" pitchFamily="34" charset="-122"/>
-                <a:cs typeface="Montserrat" pitchFamily="34" charset="-120"/>
-              </a:rPr>
               <a:t>Risk Intelligence Assistant</a:t>
             </a:r>
-            <a:endParaRPr lang="en-US" sz="3400" dirty="0"/>
-          </a:p>
-        </p:txBody>
-      </p:sp>
-      <p:sp>
-        <p:nvSpPr>
-          <p:cNvPr id="10" name="Text 8"/>
-          <p:cNvSpPr/>
-          <p:nvPr/>
-        </p:nvSpPr>
-        <p:spPr>
-          <a:xfrm>
-            <a:off x="731520" y="2606040"/>
-            <a:ext cx="5486400" cy="365760"/>
-          </a:xfrm>
-          <a:prstGeom prst="rect">
-            <a:avLst/>
-          </a:prstGeom>
-          <a:noFill/>
-          <a:ln/>
-        </p:spPr>
-        <p:txBody>
-          <a:bodyPr wrap="square" lIns="0" tIns="0" rIns="0" bIns="0" rtlCol="0" anchor="ctr"/>
-          <a:lstStyle/>
-          <a:p>
-            <a:pPr indent="0" marL="0">
-              <a:buNone/>
-            </a:pPr>
-            <a:r>
-              <a:rPr lang="en-US" sz="1200" i="1" dirty="0">
-                <a:solidFill>
-                  <a:srgbClr val="374151"/>
-                </a:solidFill>
-                <a:latin typeface="Roboto" pitchFamily="34" charset="0"/>
-                <a:ea typeface="Roboto" pitchFamily="34" charset="-122"/>
-                <a:cs typeface="Roboto" pitchFamily="34" charset="-120"/>
-              </a:rPr>
-              <a:t>Analyse · Predict · Recommend · Across Your Entire Supply Chain</a:t>
-            </a:r>
-            <a:endParaRPr lang="en-US" sz="1200" dirty="0"/>
-          </a:p>
-        </p:txBody>
-      </p:sp>
-      <p:sp>
-        <p:nvSpPr>
-          <p:cNvPr id="11" name="Shape 9"/>
-          <p:cNvSpPr/>
-          <p:nvPr/>
-        </p:nvSpPr>
-        <p:spPr>
-          <a:xfrm>
-            <a:off x="731520" y="3154680"/>
-            <a:ext cx="1463040" cy="292608"/>
-          </a:xfrm>
-          <a:prstGeom prst="rect">
-            <a:avLst/>
-          </a:prstGeom>
-          <a:solidFill>
-            <a:srgbClr val="E5E7EB"/>
-          </a:solidFill>
-          <a:ln w="12700">
-            <a:solidFill>
-              <a:srgbClr val="E5E7EB"/>
-            </a:solidFill>
-            <a:prstDash val="solid"/>
-          </a:ln>
-        </p:spPr>
-      </p:sp>
-      <p:sp>
-        <p:nvSpPr>
-          <p:cNvPr id="12" name="Text 10"/>
-          <p:cNvSpPr/>
-          <p:nvPr/>
-        </p:nvSpPr>
-        <p:spPr>
-          <a:xfrm>
-            <a:off x="731520" y="3154680"/>
-            <a:ext cx="1463040" cy="292608"/>
-          </a:xfrm>
-          <a:prstGeom prst="rect">
-            <a:avLst/>
-          </a:prstGeom>
-          <a:noFill/>
-          <a:ln/>
-        </p:spPr>
-        <p:txBody>
-          <a:bodyPr wrap="square" lIns="0" tIns="0" rIns="0" bIns="0" rtlCol="0" anchor="ctr"/>
-          <a:lstStyle/>
-          <a:p>
-            <a:pPr algn="ctr" indent="0" marL="0">
-              <a:buNone/>
-            </a:pPr>
-            <a:r>
-              <a:rPr lang="en-US" sz="850" dirty="0">
-                <a:solidFill>
-                  <a:srgbClr val="1F2937"/>
-                </a:solidFill>
-                <a:latin typeface="Roboto" pitchFamily="34" charset="0"/>
-                <a:ea typeface="Roboto" pitchFamily="34" charset="-122"/>
-                <a:cs typeface="Roboto" pitchFamily="34" charset="-120"/>
-              </a:rPr>
-              <a:t>Multi-Agent AI</a:t>
-            </a:r>
-            <a:endParaRPr lang="en-US" sz="850" dirty="0"/>
-          </a:p>
-        </p:txBody>
-      </p:sp>
-      <p:sp>
-        <p:nvSpPr>
-          <p:cNvPr id="13" name="Shape 11"/>
-          <p:cNvSpPr/>
-          <p:nvPr/>
-        </p:nvSpPr>
-        <p:spPr>
-          <a:xfrm>
-            <a:off x="2286000" y="3154680"/>
-            <a:ext cx="1463040" cy="292608"/>
-          </a:xfrm>
-          <a:prstGeom prst="rect">
-            <a:avLst/>
-          </a:prstGeom>
-          <a:solidFill>
-            <a:srgbClr val="E5E7EB"/>
-          </a:solidFill>
-          <a:ln w="12700">
-            <a:solidFill>
-              <a:srgbClr val="E5E7EB"/>
-            </a:solidFill>
-            <a:prstDash val="solid"/>
-          </a:ln>
-        </p:spPr>
-      </p:sp>
-      <p:sp>
-        <p:nvSpPr>
-          <p:cNvPr id="14" name="Text 12"/>
-          <p:cNvSpPr/>
-          <p:nvPr/>
-        </p:nvSpPr>
-        <p:spPr>
-          <a:xfrm>
-            <a:off x="2286000" y="3154680"/>
-            <a:ext cx="1463040" cy="292608"/>
-          </a:xfrm>
-          <a:prstGeom prst="rect">
-            <a:avLst/>
-          </a:prstGeom>
-          <a:noFill/>
-          <a:ln/>
-        </p:spPr>
-        <p:txBody>
-          <a:bodyPr wrap="square" lIns="0" tIns="0" rIns="0" bIns="0" rtlCol="0" anchor="ctr"/>
-          <a:lstStyle/>
-          <a:p>
-            <a:pPr algn="ctr" indent="0" marL="0">
-              <a:buNone/>
-            </a:pPr>
-            <a:r>
-              <a:rPr lang="en-US" sz="850" dirty="0">
-                <a:solidFill>
-                  <a:srgbClr val="1F2937"/>
-                </a:solidFill>
-                <a:latin typeface="Roboto" pitchFamily="34" charset="0"/>
-                <a:ea typeface="Roboto" pitchFamily="34" charset="-122"/>
-                <a:cs typeface="Roboto" pitchFamily="34" charset="-120"/>
-              </a:rPr>
-              <a:t>Hybrid RAG</a:t>
-            </a:r>
-            <a:endParaRPr lang="en-US" sz="850" dirty="0"/>
-          </a:p>
-        </p:txBody>
-      </p:sp>
-      <p:sp>
-        <p:nvSpPr>
-          <p:cNvPr id="15" name="Shape 13"/>
-          <p:cNvSpPr/>
-          <p:nvPr/>
-        </p:nvSpPr>
-        <p:spPr>
-          <a:xfrm>
-            <a:off x="3840480" y="3154680"/>
-            <a:ext cx="1463040" cy="292608"/>
-          </a:xfrm>
-          <a:prstGeom prst="rect">
-            <a:avLst/>
-          </a:prstGeom>
-          <a:solidFill>
-            <a:srgbClr val="E5E7EB"/>
-          </a:solidFill>
-          <a:ln w="12700">
-            <a:solidFill>
-              <a:srgbClr val="E5E7EB"/>
-            </a:solidFill>
-            <a:prstDash val="solid"/>
-          </a:ln>
-        </p:spPr>
-      </p:sp>
-      <p:sp>
-        <p:nvSpPr>
-          <p:cNvPr id="16" name="Text 14"/>
-          <p:cNvSpPr/>
-          <p:nvPr/>
-        </p:nvSpPr>
-        <p:spPr>
-          <a:xfrm>
-            <a:off x="3840480" y="3154680"/>
-            <a:ext cx="1463040" cy="292608"/>
-          </a:xfrm>
-          <a:prstGeom prst="rect">
-            <a:avLst/>
-          </a:prstGeom>
-          <a:noFill/>
-          <a:ln/>
-        </p:spPr>
-        <p:txBody>
-          <a:bodyPr wrap="square" lIns="0" tIns="0" rIns="0" bIns="0" rtlCol="0" anchor="ctr"/>
-          <a:lstStyle/>
-          <a:p>
-            <a:pPr algn="ctr" indent="0" marL="0">
-              <a:buNone/>
-            </a:pPr>
-            <a:r>
-              <a:rPr lang="en-US" sz="850" dirty="0">
-                <a:solidFill>
-                  <a:srgbClr val="1F2937"/>
-                </a:solidFill>
-                <a:latin typeface="Roboto" pitchFamily="34" charset="0"/>
-                <a:ea typeface="Roboto" pitchFamily="34" charset="-122"/>
-                <a:cs typeface="Roboto" pitchFamily="34" charset="-120"/>
-              </a:rPr>
-              <a:t>LangGraph</a:t>
-            </a:r>
-            <a:endParaRPr lang="en-US" sz="850" dirty="0"/>
-          </a:p>
-        </p:txBody>
-      </p:sp>
-      <p:sp>
-        <p:nvSpPr>
-          <p:cNvPr id="17" name="Shape 15"/>
-          <p:cNvSpPr/>
-          <p:nvPr/>
-        </p:nvSpPr>
-        <p:spPr>
-          <a:xfrm>
-            <a:off x="5394960" y="3154680"/>
-            <a:ext cx="1463040" cy="292608"/>
-          </a:xfrm>
-          <a:prstGeom prst="rect">
-            <a:avLst/>
-          </a:prstGeom>
-          <a:solidFill>
-            <a:srgbClr val="E5E7EB"/>
-          </a:solidFill>
-          <a:ln w="12700">
-            <a:solidFill>
-              <a:srgbClr val="E5E7EB"/>
-            </a:solidFill>
-            <a:prstDash val="solid"/>
-          </a:ln>
-        </p:spPr>
-      </p:sp>
-      <p:sp>
-        <p:nvSpPr>
-          <p:cNvPr id="18" name="Text 16"/>
-          <p:cNvSpPr/>
-          <p:nvPr/>
-        </p:nvSpPr>
-        <p:spPr>
-          <a:xfrm>
-            <a:off x="5394960" y="3154680"/>
-            <a:ext cx="1463040" cy="292608"/>
-          </a:xfrm>
-          <a:prstGeom prst="rect">
-            <a:avLst/>
-          </a:prstGeom>
-          <a:noFill/>
-          <a:ln/>
-        </p:spPr>
-        <p:txBody>
-          <a:bodyPr wrap="square" lIns="0" tIns="0" rIns="0" bIns="0" rtlCol="0" anchor="ctr"/>
-          <a:lstStyle/>
-          <a:p>
-            <a:pPr algn="ctr" indent="0" marL="0">
-              <a:buNone/>
-            </a:pPr>
-            <a:r>
-              <a:rPr lang="en-US" sz="850" dirty="0">
-                <a:solidFill>
-                  <a:srgbClr val="1F2937"/>
-                </a:solidFill>
-                <a:latin typeface="Roboto" pitchFamily="34" charset="0"/>
-                <a:ea typeface="Roboto" pitchFamily="34" charset="-122"/>
-                <a:cs typeface="Roboto" pitchFamily="34" charset="-120"/>
-              </a:rPr>
-              <a:t>DeepEval + RAGAS</a:t>
-            </a:r>
-            <a:endParaRPr lang="en-US" sz="850" dirty="0"/>
-          </a:p>
-        </p:txBody>
-      </p:sp>
-      <p:sp>
-        <p:nvSpPr>
-          <p:cNvPr id="19" name="Shape 17"/>
-          <p:cNvSpPr/>
-          <p:nvPr/>
-        </p:nvSpPr>
-        <p:spPr>
-          <a:xfrm>
-            <a:off x="6949440" y="3154680"/>
-            <a:ext cx="1463040" cy="292608"/>
-          </a:xfrm>
-          <a:prstGeom prst="rect">
-            <a:avLst/>
-          </a:prstGeom>
-          <a:solidFill>
-            <a:srgbClr val="E5E7EB"/>
-          </a:solidFill>
-          <a:ln w="12700">
-            <a:solidFill>
-              <a:srgbClr val="E5E7EB"/>
-            </a:solidFill>
-            <a:prstDash val="solid"/>
-          </a:ln>
-        </p:spPr>
-      </p:sp>
-      <p:sp>
-        <p:nvSpPr>
-          <p:cNvPr id="20" name="Text 18"/>
-          <p:cNvSpPr/>
-          <p:nvPr/>
-        </p:nvSpPr>
-        <p:spPr>
-          <a:xfrm>
-            <a:off x="6949440" y="3154680"/>
-            <a:ext cx="1463040" cy="292608"/>
-          </a:xfrm>
-          <a:prstGeom prst="rect">
-            <a:avLst/>
-          </a:prstGeom>
-          <a:noFill/>
-          <a:ln/>
-        </p:spPr>
-        <p:txBody>
-          <a:bodyPr wrap="square" lIns="0" tIns="0" rIns="0" bIns="0" rtlCol="0" anchor="ctr"/>
-          <a:lstStyle/>
-          <a:p>
-            <a:pPr algn="ctr" indent="0" marL="0">
-              <a:buNone/>
-            </a:pPr>
-            <a:r>
-              <a:rPr lang="en-US" sz="850" dirty="0">
-                <a:solidFill>
-                  <a:srgbClr val="1F2937"/>
-                </a:solidFill>
-                <a:latin typeface="Roboto" pitchFamily="34" charset="0"/>
-                <a:ea typeface="Roboto" pitchFamily="34" charset="-122"/>
-                <a:cs typeface="Roboto" pitchFamily="34" charset="-120"/>
-              </a:rPr>
-              <a:t>Real Datasets</a:t>
-            </a:r>
-            <a:endParaRPr lang="en-US" sz="850" dirty="0"/>
-          </a:p>
-        </p:txBody>
-      </p:sp>
-      <p:sp>
-        <p:nvSpPr>
-          <p:cNvPr id="21" name="Text 19"/>
-          <p:cNvSpPr/>
-          <p:nvPr/>
-        </p:nvSpPr>
-        <p:spPr>
-          <a:xfrm>
-            <a:off x="731520" y="4480560"/>
-            <a:ext cx="5486400" cy="274320"/>
-          </a:xfrm>
-          <a:prstGeom prst="rect">
-            <a:avLst/>
-          </a:prstGeom>
-          <a:noFill/>
-          <a:ln/>
-        </p:spPr>
-        <p:txBody>
-          <a:bodyPr wrap="square" lIns="0" tIns="0" rIns="0" bIns="0" rtlCol="0" anchor="ctr"/>
-          <a:lstStyle/>
-          <a:p>
-            <a:pPr indent="0" marL="0">
-              <a:buNone/>
-            </a:pPr>
-            <a:r>
-              <a:rPr lang="en-US" sz="900" dirty="0">
-                <a:solidFill>
-                  <a:srgbClr val="6B7280"/>
-                </a:solidFill>
-                <a:latin typeface="Roboto" pitchFamily="34" charset="0"/>
-                <a:ea typeface="Roboto" pitchFamily="34" charset="-122"/>
-                <a:cs typeface="Roboto" pitchFamily="34" charset="-120"/>
-              </a:rPr>
-              <a:t>Sai Krishna Gangadharuni  |  Prodapt  |  June 2026</a:t>
-            </a:r>
-            <a:endParaRPr lang="en-US" sz="900" dirty="0"/>
+            <a:endParaRPr lang="en-US" sz="2400" dirty="0"/>
           </a:p>
         </p:txBody>
       </p:sp>
